--- a/docs/Research_Project_Plan_Gantt.pptx
+++ b/docs/Research_Project_Plan_Gantt.pptx
@@ -601,7 +601,7 @@
           </a:p>
           <a:p xmlns:a="http://schemas.openxmlformats.org/drawingml/2006/main">
             <a:r>
-              <a:t>October 5 is the next planned Mina meeting. The Stage 1 milestone is a working definition of alignment and a decision about the next matched comparison. Specify the objects being aligned, biological question, unit, metric and reference, and what the result can support.</a:t>
+              <a:t>October 7 is the next planned Mina meeting. The Stage 1 milestone is a working definition of alignment and a decision about the next matched comparison. Specify the objects being aligned, biological question, unit, metric and reference, and what the result can support.</a:t>
             </a:r>
           </a:p>
           <a:p xmlns:a="http://schemas.openxmlformats.org/drawingml/2006/main">
@@ -911,7 +911,7 @@
           </a:p>
           <a:p xmlns:a="http://schemas.openxmlformats.org/drawingml/2006/main">
             <a:r>
-              <a:t>Expected outcome: Test input/feature correspondence and selected simple fusion methods in a small prototype. Compare outputs with controls and bring feasibility findings and deviations from the paper to the October 5 review.</a:t>
+              <a:t>Expected outcome: Test input/feature correspondence and selected simple fusion methods in a small prototype. Compare outputs with controls and bring feasibility findings and deviations from the paper to the October 7 review.</a:t>
             </a:r>
           </a:p>
           <a:p xmlns:a="http://schemas.openxmlformats.org/drawingml/2006/main">
@@ -926,12 +926,12 @@
           </a:p>
           <a:p xmlns:a="http://schemas.openxmlformats.org/drawingml/2006/main">
             <a:r>
-              <a:t>13. Oct 5 review and working alignment definition</a:t>
-            </a:r>
-          </a:p>
-          <a:p xmlns:a="http://schemas.openxmlformats.org/drawingml/2006/main">
-            <a:r>
-              <a:t>2026-10-05 to 2026-10-05; Planned.</a:t>
+              <a:t>13. Oct 7 review and working alignment definition</a:t>
+            </a:r>
+          </a:p>
+          <a:p xmlns:a="http://schemas.openxmlformats.org/drawingml/2006/main">
+            <a:r>
+              <a:t>2026-10-07 to 2026-10-07; Planned.</a:t>
             </a:r>
           </a:p>
           <a:p xmlns:a="http://schemas.openxmlformats.org/drawingml/2006/main">
@@ -1642,6 +1642,24 @@
           <a:p xmlns:a="http://schemas.openxmlformats.org/drawingml/2006/main">
             <a:r>
               <a:t>Sources: Fall 2026 CAP6942 Schedule.pdf; project README.md; team meeting and schedule corrections supplied September 26, 2026.</a:t>
+            </a:r>
+          </a:p>
+          <ns0:p xmlns:ns0="http://schemas.openxmlformats.org/drawingml/2006/main"/>
+          <a:p xmlns:a="http://schemas.openxmlformats.org/drawingml/2006/main">
+            <a:r>
+              <a:t>Planning example: Mélot-Chesnel, Designing Trustworthy Generative AI Agents for Collaborative Decision Making (2026), section 4 and Figure 1, explicitly schedules reconsidering questions and hypotheses between studies. This informed retaining time for interpretation and revision. https://doi.org/10.3233/FAIA260562</a:t>
+            </a:r>
+          </a:p>
+          <ns0:p xmlns:ns0="http://schemas.openxmlformats.org/drawingml/2006/main"/>
+          <a:p xmlns:a="http://schemas.openxmlformats.org/drawingml/2006/main">
+            <a:r>
+              <a:t>Planning example: UQ AGRC7617, Sequential mid-project assessment, uses a proposal and Gantt with supervisor discussion, followed by AI feedback on mature drafts. This illustrates review within planning. https://course-profiles.uq.edu.au/course-profiles/AGRC7617-62151-7660</a:t>
+            </a:r>
+          </a:p>
+          <ns0:p xmlns:ns0="http://schemas.openxmlformats.org/drawingml/2006/main"/>
+          <a:p xmlns:a="http://schemas.openxmlformats.org/drawingml/2006/main">
+            <a:r>
+              <a:t>These examples informed the September 27 planning discussion. They do not establish CAP6942 requirements or measured AI time savings.</a:t>
             </a:r>
           </a:p>
         </p:txBody>
@@ -1741,7 +1759,7 @@
           </a:p>
           <a:p xmlns:a="http://schemas.openxmlformats.org/drawingml/2006/main">
             <a:r>
-              <a:t>October 5 is the next planned Mina meeting. The Stage 1 milestone is a working definition of alignment and a decision about the next matched comparison. Specify the objects being aligned, biological question, unit, metric and reference, and what the result can support.</a:t>
+              <a:t>October 7 is the next planned Mina meeting. The Stage 1 milestone is a working definition of alignment and a decision about the next matched comparison. Specify the objects being aligned, biological question, unit, metric and reference, and what the result can support.</a:t>
             </a:r>
           </a:p>
           <a:p xmlns:a="http://schemas.openxmlformats.org/drawingml/2006/main">
@@ -2046,7 +2064,7 @@
           </a:p>
           <a:p xmlns:a="http://schemas.openxmlformats.org/drawingml/2006/main">
             <a:r>
-              <a:t>Expected outcome: Test input/feature correspondence and selected simple fusion methods in a small prototype. Compare outputs with controls and bring feasibility findings and deviations from the paper to the October 5 review.</a:t>
+              <a:t>Expected outcome: Test input/feature correspondence and selected simple fusion methods in a small prototype. Compare outputs with controls and bring feasibility findings and deviations from the paper to the October 7 review.</a:t>
             </a:r>
           </a:p>
           <a:p xmlns:a="http://schemas.openxmlformats.org/drawingml/2006/main">
@@ -2111,7 +2129,7 @@
           </a:p>
           <a:p xmlns:a="http://schemas.openxmlformats.org/drawingml/2006/main">
             <a:r>
-              <a:t>October 5 review and follow-up</a:t>
+              <a:t>October 7 review and follow-up</a:t>
             </a:r>
           </a:p>
           <a:p xmlns:a="http://schemas.openxmlformats.org/drawingml/2006/main">
@@ -2121,7 +2139,7 @@
           </a:p>
           <a:p xmlns:a="http://schemas.openxmlformats.org/drawingml/2006/main">
             <a:r>
-              <a:t>12. Prepare the Oct 5 evidence and question set</a:t>
+              <a:t>12. Prepare the Oct 7 evidence and question set</a:t>
             </a:r>
           </a:p>
           <a:p xmlns:a="http://schemas.openxmlformats.org/drawingml/2006/main">
@@ -2146,12 +2164,12 @@
           </a:p>
           <a:p xmlns:a="http://schemas.openxmlformats.org/drawingml/2006/main">
             <a:r>
-              <a:t>13. Oct 5 review and working alignment definition</a:t>
-            </a:r>
-          </a:p>
-          <a:p xmlns:a="http://schemas.openxmlformats.org/drawingml/2006/main">
-            <a:r>
-              <a:t>2026-10-05 to 2026-10-05; Planned.</a:t>
+              <a:t>13. Oct 7 review and working alignment definition</a:t>
+            </a:r>
+          </a:p>
+          <a:p xmlns:a="http://schemas.openxmlformats.org/drawingml/2006/main">
+            <a:r>
+              <a:t>2026-10-07 to 2026-10-07; Planned.</a:t>
             </a:r>
           </a:p>
           <a:p xmlns:a="http://schemas.openxmlformats.org/drawingml/2006/main">
@@ -2321,7 +2339,7 @@
           </a:p>
           <a:p xmlns:a="http://schemas.openxmlformats.org/drawingml/2006/main">
             <a:r>
-              <a:t>October 5 is the next planned Mina meeting. The Stage 1 milestone is a working definition of alignment and a decision about the next matched comparison. Specify the objects being aligned, biological question, unit, metric and reference, and what the result can support.</a:t>
+              <a:t>October 7 is the next planned Mina meeting. The Stage 1 milestone is a working definition of alignment and a decision about the next matched comparison. Specify the objects being aligned, biological question, unit, metric and reference, and what the result can support.</a:t>
             </a:r>
           </a:p>
           <a:p xmlns:a="http://schemas.openxmlformats.org/drawingml/2006/main">
@@ -2792,6 +2810,24 @@
           <a:p xmlns:a="http://schemas.openxmlformats.org/drawingml/2006/main">
             <a:r>
               <a:t>Sources: Fall 2026 CAP6942 Schedule.pdf; project README.md; team meeting and schedule corrections supplied September 26, 2026.</a:t>
+            </a:r>
+          </a:p>
+          <ns0:p xmlns:ns0="http://schemas.openxmlformats.org/drawingml/2006/main"/>
+          <a:p xmlns:a="http://schemas.openxmlformats.org/drawingml/2006/main">
+            <a:r>
+              <a:t>Planning example: Mélot-Chesnel, Designing Trustworthy Generative AI Agents for Collaborative Decision Making (2026), section 4 and Figure 1, explicitly schedules reconsidering questions and hypotheses between studies. This informed retaining time for interpretation and revision. https://doi.org/10.3233/FAIA260562</a:t>
+            </a:r>
+          </a:p>
+          <ns0:p xmlns:ns0="http://schemas.openxmlformats.org/drawingml/2006/main"/>
+          <a:p xmlns:a="http://schemas.openxmlformats.org/drawingml/2006/main">
+            <a:r>
+              <a:t>Planning example: UQ AGRC7617, Sequential mid-project assessment, uses a proposal and Gantt with supervisor discussion, followed by AI feedback on mature drafts. This illustrates review within planning. https://course-profiles.uq.edu.au/course-profiles/AGRC7617-62151-7660</a:t>
+            </a:r>
+          </a:p>
+          <ns0:p xmlns:ns0="http://schemas.openxmlformats.org/drawingml/2006/main"/>
+          <a:p xmlns:a="http://schemas.openxmlformats.org/drawingml/2006/main">
+            <a:r>
+              <a:t>These examples informed the September 27 planning discussion. They do not establish CAP6942 requirements or measured AI time savings.</a:t>
             </a:r>
           </a:p>
         </p:txBody>

--- a/docs/Research_Project_Plan_Gantt.pptx
+++ b/docs/Research_Project_Plan_Gantt.pptx
@@ -8323,7 +8323,7 @@
                 <a:ea typeface="Arial"/>
                 <a:cs typeface="Arial"/>
               </a:rPr>
-              <a:t>As of Oct 15, 2026</a:t>
+              <a:t>As of Oct 19, 2026</a:t>
             </a:r>
           </a:p>
         </p:txBody>
@@ -32436,7 +32436,7 @@
                 <a:ea typeface="Arial"/>
                 <a:cs typeface="Arial"/>
               </a:rPr>
-              <a:t>As of Oct 15, 2026</a:t>
+              <a:t>As of Oct 19, 2026</a:t>
             </a:r>
           </a:p>
         </p:txBody>
@@ -33469,7 +33469,7 @@
                 <a:ea typeface="Arial"/>
                 <a:cs typeface="Arial"/>
               </a:rPr>
-              <a:t>As of Oct 15, 2026</a:t>
+              <a:t>As of Oct 19, 2026</a:t>
             </a:r>
           </a:p>
         </p:txBody>
@@ -35011,7 +35011,7 @@
                 <a:ea typeface="Arial"/>
                 <a:cs typeface="Arial"/>
               </a:rPr>
-              <a:t>Planned</a:t>
+              <a:t>In progress</a:t>
             </a:r>
           </a:p>
         </p:txBody>
@@ -35084,7 +35084,7 @@
             <a:avLst/>
           </a:prstGeom>
           <a:solidFill xmlns:a="http://schemas.openxmlformats.org/drawingml/2006/main">
-            <a:srgbClr val="B7BEC4"/>
+            <a:srgbClr val="DCA323"/>
           </a:solidFill>
           <a:ln xmlns:a="http://schemas.openxmlformats.org/drawingml/2006/main" w="0">
             <a:noFill/>
@@ -35640,7 +35640,7 @@
                 <a:ea typeface="Arial"/>
                 <a:cs typeface="Arial"/>
               </a:rPr>
-              <a:t>Planned</a:t>
+              <a:t>In progress</a:t>
             </a:r>
           </a:p>
         </p:txBody>
@@ -35713,7 +35713,7 @@
             <a:avLst/>
           </a:prstGeom>
           <a:solidFill xmlns:a="http://schemas.openxmlformats.org/drawingml/2006/main">
-            <a:srgbClr val="B7BEC4"/>
+            <a:srgbClr val="DCA323"/>
           </a:solidFill>
           <a:ln xmlns:a="http://schemas.openxmlformats.org/drawingml/2006/main" w="0">
             <a:noFill/>
@@ -38100,7 +38100,7 @@
                 <a:ea typeface="Arial"/>
                 <a:cs typeface="Arial"/>
               </a:rPr>
-              <a:t>Planned</a:t>
+              <a:t>In progress</a:t>
             </a:r>
           </a:p>
         </p:txBody>
@@ -38173,7 +38173,7 @@
             <a:avLst/>
           </a:prstGeom>
           <a:solidFill xmlns:a="http://schemas.openxmlformats.org/drawingml/2006/main">
-            <a:srgbClr val="B7BEC4"/>
+            <a:srgbClr val="DCA323"/>
           </a:solidFill>
           <a:ln xmlns:a="http://schemas.openxmlformats.org/drawingml/2006/main" w="0">
             <a:noFill/>
@@ -38701,7 +38701,7 @@
                 <a:ea typeface="Arial"/>
                 <a:cs typeface="Arial"/>
               </a:rPr>
-              <a:t>Planned</a:t>
+              <a:t>In progress</a:t>
             </a:r>
           </a:p>
         </p:txBody>
@@ -38774,7 +38774,7 @@
             <a:avLst/>
           </a:prstGeom>
           <a:solidFill xmlns:a="http://schemas.openxmlformats.org/drawingml/2006/main">
-            <a:srgbClr val="B7BEC4"/>
+            <a:srgbClr val="DCA323"/>
           </a:solidFill>
           <a:ln xmlns:a="http://schemas.openxmlformats.org/drawingml/2006/main" w="0">
             <a:noFill/>
@@ -40010,7 +40010,7 @@
                 <a:ea typeface="Arial"/>
                 <a:cs typeface="Arial"/>
               </a:rPr>
-              <a:t>Planned</a:t>
+              <a:t>In progress</a:t>
             </a:r>
           </a:p>
         </p:txBody>
@@ -40083,7 +40083,7 @@
             <a:avLst/>
           </a:prstGeom>
           <a:solidFill xmlns:a="http://schemas.openxmlformats.org/drawingml/2006/main">
-            <a:srgbClr val="B7BEC4"/>
+            <a:srgbClr val="DCA323"/>
           </a:solidFill>
           <a:ln xmlns:a="http://schemas.openxmlformats.org/drawingml/2006/main" w="0">
             <a:noFill/>

--- a/docs/Research_Project_Plan_Gantt.pptx
+++ b/docs/Research_Project_Plan_Gantt.pptx
@@ -8323,7 +8323,7 @@
                 <a:ea typeface="Arial"/>
                 <a:cs typeface="Arial"/>
               </a:rPr>
-              <a:t>As of Oct 19, 2026</a:t>
+              <a:t>As of Oct 20, 2026</a:t>
             </a:r>
           </a:p>
         </p:txBody>
@@ -32436,7 +32436,7 @@
                 <a:ea typeface="Arial"/>
                 <a:cs typeface="Arial"/>
               </a:rPr>
-              <a:t>As of Oct 19, 2026</a:t>
+              <a:t>As of Oct 20, 2026</a:t>
             </a:r>
           </a:p>
         </p:txBody>
@@ -33469,7 +33469,7 @@
                 <a:ea typeface="Arial"/>
                 <a:cs typeface="Arial"/>
               </a:rPr>
-              <a:t>As of Oct 19, 2026</a:t>
+              <a:t>As of Oct 20, 2026</a:t>
             </a:r>
           </a:p>
         </p:txBody>
@@ -36241,7 +36241,7 @@
                 <a:ea typeface="Arial"/>
                 <a:cs typeface="Arial"/>
               </a:rPr>
-              <a:t>Planned</a:t>
+              <a:t>In progress</a:t>
             </a:r>
           </a:p>
         </p:txBody>
@@ -36314,7 +36314,7 @@
             <a:avLst/>
           </a:prstGeom>
           <a:solidFill xmlns:a="http://schemas.openxmlformats.org/drawingml/2006/main">
-            <a:srgbClr val="B7BEC4"/>
+            <a:srgbClr val="DCA323"/>
           </a:solidFill>
           <a:ln xmlns:a="http://schemas.openxmlformats.org/drawingml/2006/main" w="0">
             <a:noFill/>

--- a/docs/Research_Project_Plan_Gantt.pptx
+++ b/docs/Research_Project_Plan_Gantt.pptx
@@ -13100,7 +13100,7 @@
                 <a:ea typeface="Arial"/>
                 <a:cs typeface="Arial"/>
               </a:rPr>
-              <a:t>Planned</a:t>
+              <a:t>In progress</a:t>
             </a:r>
           </a:p>
         </p:txBody>
@@ -13122,7 +13122,7 @@
             <a:avLst/>
           </a:prstGeom>
           <a:solidFill xmlns:a="http://schemas.openxmlformats.org/drawingml/2006/main">
-            <a:srgbClr val="B7BEC4"/>
+            <a:srgbClr val="DCA323"/>
           </a:solidFill>
           <a:ln xmlns:a="http://schemas.openxmlformats.org/drawingml/2006/main" w="0">
             <a:noFill/>
@@ -13150,7 +13150,7 @@
             <a:avLst/>
           </a:prstGeom>
           <a:solidFill xmlns:a="http://schemas.openxmlformats.org/drawingml/2006/main">
-            <a:srgbClr val="B7BEC4"/>
+            <a:srgbClr val="DCA323"/>
           </a:solidFill>
           <a:ln xmlns:a="http://schemas.openxmlformats.org/drawingml/2006/main" w="0">
             <a:noFill/>
@@ -13178,7 +13178,7 @@
             <a:avLst/>
           </a:prstGeom>
           <a:solidFill xmlns:a="http://schemas.openxmlformats.org/drawingml/2006/main">
-            <a:srgbClr val="B7BEC4"/>
+            <a:srgbClr val="DCA323"/>
           </a:solidFill>
           <a:ln xmlns:a="http://schemas.openxmlformats.org/drawingml/2006/main" w="0">
             <a:noFill/>
@@ -13874,7 +13874,7 @@
                 <a:ea typeface="Arial"/>
                 <a:cs typeface="Arial"/>
               </a:rPr>
-              <a:t>Planned</a:t>
+              <a:t>In progress</a:t>
             </a:r>
           </a:p>
         </p:txBody>
@@ -13896,7 +13896,7 @@
             <a:avLst/>
           </a:prstGeom>
           <a:solidFill xmlns:a="http://schemas.openxmlformats.org/drawingml/2006/main">
-            <a:srgbClr val="B7BEC4"/>
+            <a:srgbClr val="DCA323"/>
           </a:solidFill>
           <a:ln xmlns:a="http://schemas.openxmlformats.org/drawingml/2006/main" w="0">
             <a:noFill/>
@@ -13924,7 +13924,7 @@
             <a:avLst/>
           </a:prstGeom>
           <a:solidFill xmlns:a="http://schemas.openxmlformats.org/drawingml/2006/main">
-            <a:srgbClr val="B7BEC4"/>
+            <a:srgbClr val="DCA323"/>
           </a:solidFill>
           <a:ln xmlns:a="http://schemas.openxmlformats.org/drawingml/2006/main" w="0">
             <a:noFill/>
@@ -13952,7 +13952,7 @@
             <a:avLst/>
           </a:prstGeom>
           <a:solidFill xmlns:a="http://schemas.openxmlformats.org/drawingml/2006/main">
-            <a:srgbClr val="B7BEC4"/>
+            <a:srgbClr val="DCA323"/>
           </a:solidFill>
           <a:ln xmlns:a="http://schemas.openxmlformats.org/drawingml/2006/main" w="0">
             <a:noFill/>
@@ -13980,7 +13980,7 @@
             <a:avLst/>
           </a:prstGeom>
           <a:solidFill xmlns:a="http://schemas.openxmlformats.org/drawingml/2006/main">
-            <a:srgbClr val="B7BEC4"/>
+            <a:srgbClr val="DCA323"/>
           </a:solidFill>
           <a:ln xmlns:a="http://schemas.openxmlformats.org/drawingml/2006/main" w="0">
             <a:noFill/>
@@ -14704,7 +14704,7 @@
                 <a:ea typeface="Arial"/>
                 <a:cs typeface="Arial"/>
               </a:rPr>
-              <a:t>Planned</a:t>
+              <a:t>In progress</a:t>
             </a:r>
           </a:p>
         </p:txBody>
@@ -14726,7 +14726,7 @@
             <a:avLst/>
           </a:prstGeom>
           <a:solidFill xmlns:a="http://schemas.openxmlformats.org/drawingml/2006/main">
-            <a:srgbClr val="B7BEC4"/>
+            <a:srgbClr val="DCA323"/>
           </a:solidFill>
           <a:ln xmlns:a="http://schemas.openxmlformats.org/drawingml/2006/main" w="0">
             <a:noFill/>
@@ -14754,7 +14754,7 @@
             <a:avLst/>
           </a:prstGeom>
           <a:solidFill xmlns:a="http://schemas.openxmlformats.org/drawingml/2006/main">
-            <a:srgbClr val="B7BEC4"/>
+            <a:srgbClr val="DCA323"/>
           </a:solidFill>
           <a:ln xmlns:a="http://schemas.openxmlformats.org/drawingml/2006/main" w="0">
             <a:noFill/>
@@ -14782,7 +14782,7 @@
             <a:avLst/>
           </a:prstGeom>
           <a:solidFill xmlns:a="http://schemas.openxmlformats.org/drawingml/2006/main">
-            <a:srgbClr val="B7BEC4"/>
+            <a:srgbClr val="DCA323"/>
           </a:solidFill>
           <a:ln xmlns:a="http://schemas.openxmlformats.org/drawingml/2006/main" w="0">
             <a:noFill/>
@@ -14810,7 +14810,7 @@
             <a:avLst/>
           </a:prstGeom>
           <a:solidFill xmlns:a="http://schemas.openxmlformats.org/drawingml/2006/main">
-            <a:srgbClr val="B7BEC4"/>
+            <a:srgbClr val="DCA323"/>
           </a:solidFill>
           <a:ln xmlns:a="http://schemas.openxmlformats.org/drawingml/2006/main" w="0">
             <a:noFill/>
@@ -15506,7 +15506,7 @@
                 <a:ea typeface="Arial"/>
                 <a:cs typeface="Arial"/>
               </a:rPr>
-              <a:t>Planned</a:t>
+              <a:t>In progress</a:t>
             </a:r>
           </a:p>
         </p:txBody>
@@ -15528,7 +15528,7 @@
             <a:avLst/>
           </a:prstGeom>
           <a:solidFill xmlns:a="http://schemas.openxmlformats.org/drawingml/2006/main">
-            <a:srgbClr val="B7BEC4"/>
+            <a:srgbClr val="DCA323"/>
           </a:solidFill>
           <a:ln xmlns:a="http://schemas.openxmlformats.org/drawingml/2006/main" w="0">
             <a:noFill/>
@@ -15556,7 +15556,7 @@
             <a:avLst/>
           </a:prstGeom>
           <a:solidFill xmlns:a="http://schemas.openxmlformats.org/drawingml/2006/main">
-            <a:srgbClr val="B7BEC4"/>
+            <a:srgbClr val="DCA323"/>
           </a:solidFill>
           <a:ln xmlns:a="http://schemas.openxmlformats.org/drawingml/2006/main" w="0">
             <a:noFill/>
@@ -15584,7 +15584,7 @@
             <a:avLst/>
           </a:prstGeom>
           <a:solidFill xmlns:a="http://schemas.openxmlformats.org/drawingml/2006/main">
-            <a:srgbClr val="B7BEC4"/>
+            <a:srgbClr val="DCA323"/>
           </a:solidFill>
           <a:ln xmlns:a="http://schemas.openxmlformats.org/drawingml/2006/main" w="0">
             <a:noFill/>
@@ -15612,7 +15612,7 @@
             <a:avLst/>
           </a:prstGeom>
           <a:solidFill xmlns:a="http://schemas.openxmlformats.org/drawingml/2006/main">
-            <a:srgbClr val="B7BEC4"/>
+            <a:srgbClr val="DCA323"/>
           </a:solidFill>
           <a:ln xmlns:a="http://schemas.openxmlformats.org/drawingml/2006/main" w="0">
             <a:noFill/>
@@ -15640,7 +15640,7 @@
             <a:avLst/>
           </a:prstGeom>
           <a:solidFill xmlns:a="http://schemas.openxmlformats.org/drawingml/2006/main">
-            <a:srgbClr val="B7BEC4"/>
+            <a:srgbClr val="DCA323"/>
           </a:solidFill>
           <a:ln xmlns:a="http://schemas.openxmlformats.org/drawingml/2006/main" w="0">
             <a:noFill/>
@@ -15668,7 +15668,7 @@
             <a:avLst/>
           </a:prstGeom>
           <a:solidFill xmlns:a="http://schemas.openxmlformats.org/drawingml/2006/main">
-            <a:srgbClr val="B7BEC4"/>
+            <a:srgbClr val="DCA323"/>
           </a:solidFill>
           <a:ln xmlns:a="http://schemas.openxmlformats.org/drawingml/2006/main" w="0">
             <a:noFill/>
@@ -15696,7 +15696,7 @@
             <a:avLst/>
           </a:prstGeom>
           <a:solidFill xmlns:a="http://schemas.openxmlformats.org/drawingml/2006/main">
-            <a:srgbClr val="B7BEC4"/>
+            <a:srgbClr val="DCA323"/>
           </a:solidFill>
           <a:ln xmlns:a="http://schemas.openxmlformats.org/drawingml/2006/main" w="0">
             <a:noFill/>
@@ -36241,7 +36241,7 @@
                 <a:ea typeface="Arial"/>
                 <a:cs typeface="Arial"/>
               </a:rPr>
-              <a:t>In progress</a:t>
+              <a:t>Complete</a:t>
             </a:r>
           </a:p>
         </p:txBody>
@@ -36314,7 +36314,7 @@
             <a:avLst/>
           </a:prstGeom>
           <a:solidFill xmlns:a="http://schemas.openxmlformats.org/drawingml/2006/main">
-            <a:srgbClr val="DCA323"/>
+            <a:srgbClr val="595959"/>
           </a:solidFill>
           <a:ln xmlns:a="http://schemas.openxmlformats.org/drawingml/2006/main" w="0">
             <a:noFill/>
@@ -37471,7 +37471,7 @@
                 <a:ea typeface="Arial"/>
                 <a:cs typeface="Arial"/>
               </a:rPr>
-              <a:t>Planned</a:t>
+              <a:t>In progress</a:t>
             </a:r>
           </a:p>
         </p:txBody>
@@ -37522,7 +37522,7 @@
                 <a:ea typeface="Arial"/>
                 <a:cs typeface="Arial"/>
               </a:rPr>
-              <a:t>10/26-11/8</a:t>
+              <a:t>10/20-11/8</a:t>
             </a:r>
           </a:p>
         </p:txBody>
@@ -37537,14 +37537,14 @@
         </p:nvSpPr>
         <p:spPr>
           <a:xfrm xmlns:a="http://schemas.openxmlformats.org/drawingml/2006/main">
-            <a:off x="7502175" y="2418226"/>
-            <a:ext cx="766000" cy="104775"/>
+            <a:off x="7119175" y="2418226"/>
+            <a:ext cx="1149000" cy="104775"/>
           </a:xfrm>
           <a:prstGeom xmlns:a="http://schemas.openxmlformats.org/drawingml/2006/main" prst="rect">
             <a:avLst/>
           </a:prstGeom>
           <a:solidFill xmlns:a="http://schemas.openxmlformats.org/drawingml/2006/main">
-            <a:srgbClr val="B7BEC4"/>
+            <a:srgbClr val="DCA323"/>
           </a:solidFill>
           <a:ln xmlns:a="http://schemas.openxmlformats.org/drawingml/2006/main" w="0">
             <a:noFill/>
@@ -39330,7 +39330,7 @@
                 <a:ea typeface="Arial"/>
                 <a:cs typeface="Arial"/>
               </a:rPr>
-              <a:t>Planned</a:t>
+              <a:t>In progress</a:t>
             </a:r>
           </a:p>
         </p:txBody>
@@ -39403,7 +39403,7 @@
             <a:avLst/>
           </a:prstGeom>
           <a:solidFill xmlns:a="http://schemas.openxmlformats.org/drawingml/2006/main">
-            <a:srgbClr val="B7BEC4"/>
+            <a:srgbClr val="DCA323"/>
           </a:solidFill>
           <a:ln xmlns:a="http://schemas.openxmlformats.org/drawingml/2006/main" w="0">
             <a:noFill/>

--- a/docs/Research_Project_Plan_Gantt.pptx
+++ b/docs/Research_Project_Plan_Gantt.pptx
@@ -8323,7 +8323,7 @@
                 <a:ea typeface="Arial"/>
                 <a:cs typeface="Arial"/>
               </a:rPr>
-              <a:t>As of Oct 20, 2026</a:t>
+              <a:t>As of Oct 22, 2026</a:t>
             </a:r>
           </a:p>
         </p:txBody>
@@ -32436,7 +32436,7 @@
                 <a:ea typeface="Arial"/>
                 <a:cs typeface="Arial"/>
               </a:rPr>
-              <a:t>As of Oct 20, 2026</a:t>
+              <a:t>As of Oct 22, 2026</a:t>
             </a:r>
           </a:p>
         </p:txBody>
@@ -33469,7 +33469,7 @@
                 <a:ea typeface="Arial"/>
                 <a:cs typeface="Arial"/>
               </a:rPr>
-              <a:t>As of Oct 20, 2026</a:t>
+              <a:t>As of Oct 22, 2026</a:t>
             </a:r>
           </a:p>
         </p:txBody>
@@ -38151,7 +38151,7 @@
                 <a:ea typeface="Arial"/>
                 <a:cs typeface="Arial"/>
               </a:rPr>
-              <a:t>11/9-11/22</a:t>
+              <a:t>10/22-11/22</a:t>
             </a:r>
           </a:p>
         </p:txBody>
@@ -38166,8 +38166,8 @@
         </p:nvSpPr>
         <p:spPr>
           <a:xfrm xmlns:a="http://schemas.openxmlformats.org/drawingml/2006/main">
-            <a:off x="8268175" y="2632818"/>
-            <a:ext cx="766000" cy="104775"/>
+            <a:off x="7119175" y="2632818"/>
+            <a:ext cx="1915000" cy="104775"/>
           </a:xfrm>
           <a:prstGeom xmlns:a="http://schemas.openxmlformats.org/drawingml/2006/main" prst="rect">
             <a:avLst/>
@@ -39381,7 +39381,7 @@
                 <a:ea typeface="Arial"/>
                 <a:cs typeface="Arial"/>
               </a:rPr>
-              <a:t>11/23-12/20</a:t>
+              <a:t>10/22-12/20</a:t>
             </a:r>
           </a:p>
         </p:txBody>
@@ -39396,8 +39396,8 @@
         </p:nvSpPr>
         <p:spPr>
           <a:xfrm xmlns:a="http://schemas.openxmlformats.org/drawingml/2006/main">
-            <a:off x="9034175" y="3062002"/>
-            <a:ext cx="1532000" cy="104775"/>
+            <a:off x="7119175" y="3062002"/>
+            <a:ext cx="3447000" cy="104775"/>
           </a:xfrm>
           <a:prstGeom xmlns:a="http://schemas.openxmlformats.org/drawingml/2006/main" prst="rect">
             <a:avLst/>

--- a/docs/Research_Project_Plan_Gantt.pptx
+++ b/docs/Research_Project_Plan_Gantt.pptx
@@ -8323,7 +8323,7 @@
                 <a:ea typeface="Arial"/>
                 <a:cs typeface="Arial"/>
               </a:rPr>
-              <a:t>As of Oct 22, 2026</a:t>
+              <a:t>As of Oct 25, 2026</a:t>
             </a:r>
           </a:p>
         </p:txBody>
@@ -32436,7 +32436,7 @@
                 <a:ea typeface="Arial"/>
                 <a:cs typeface="Arial"/>
               </a:rPr>
-              <a:t>As of Oct 22, 2026</a:t>
+              <a:t>As of Oct 25, 2026</a:t>
             </a:r>
           </a:p>
         </p:txBody>
@@ -33469,7 +33469,7 @@
                 <a:ea typeface="Arial"/>
                 <a:cs typeface="Arial"/>
               </a:rPr>
-              <a:t>As of Oct 22, 2026</a:t>
+              <a:t>As of Oct 25, 2026</a:t>
             </a:r>
           </a:p>
         </p:txBody>
